--- a/bitemp_register_v06/docs/presentaties/Deepseek/FOST & apidays Amsterdam 2026 v0.5.pptx
+++ b/bitemp_register_v06/docs/presentaties/Deepseek/FOST & apidays Amsterdam 2026 v0.5.pptx
@@ -12833,19 +12833,6 @@
       </p:bgPr>
     </p:bg>
     <p:spTree>
-      <p:nvGrpSpPr>
-        <p:cNvPr id="1" name="Shape 194"/>
-        <p:cNvGrpSpPr/>
-        <p:nvPr/>
-      </p:nvGrpSpPr>
-      <p:grpSpPr>
-        <a:xfrm>
-          <a:off x="0" y="0"/>
-          <a:ext cx="0" cy="0"/>
-          <a:chOff x="0" y="0"/>
-          <a:chExt cx="0" cy="0"/>
-        </a:xfrm>
-      </p:grpSpPr>
       <p:pic>
         <p:nvPicPr>
           <p:cNvPr id="195" name="Google Shape;195;p22" descr="image.png"/>
@@ -12927,6 +12914,19 @@
           </a:ln>
         </p:spPr>
       </p:pic>
+      <p:nvGrpSpPr>
+        <p:cNvPr id="1" name="Shape 194"/>
+        <p:cNvGrpSpPr/>
+        <p:nvPr/>
+      </p:nvGrpSpPr>
+      <p:grpSpPr>
+        <a:xfrm>
+          <a:off x="0" y="0"/>
+          <a:ext cx="0" cy="0"/>
+          <a:chOff x="0" y="0"/>
+          <a:chExt cx="0" cy="0"/>
+        </a:xfrm>
+      </p:grpSpPr>
       <p:sp>
         <p:nvSpPr>
           <p:cNvPr id="199" name="TextBox 198"/>
@@ -12950,7 +12950,11 @@
           <a:lstStyle/>
           <a:p>
             <a:r>
-              <a:rPr sz="2800" b="1"/>
+              <a:rPr sz="2800" b="1">
+                <a:solidFill>
+                  <a:srgbClr val="F5F5F5"/>
+                </a:solidFill>
+              </a:rPr>
               <a:t>GraphQL vs REST Mythes</a:t>
             </a:r>
           </a:p>
@@ -12979,43 +12983,71 @@
           <a:lstStyle/>
           <a:p>
             <a:r>
-              <a:rPr sz="1600" b="1"/>
+              <a:rPr sz="1600" b="1">
+                <a:solidFill>
+                  <a:srgbClr val="DAFFDE"/>
+                </a:solidFill>
+              </a:rPr>
               <a:t>Jens Neuse (WunderGraph) ontmaskert dogma's:</a:t>
             </a:r>
           </a:p>
           <a:p>
             <a:r>
-              <a:rPr sz="1600" b="1"/>
+              <a:rPr sz="1600" b="1">
+                <a:solidFill>
+                  <a:srgbClr val="DAFFDE"/>
+                </a:solidFill>
+              </a:rPr>
               <a:t/>
             </a:r>
           </a:p>
           <a:p>
             <a:r>
-              <a:rPr sz="1600" b="1"/>
+              <a:rPr sz="1600" b="1">
+                <a:solidFill>
+                  <a:srgbClr val="DAFFDE"/>
+                </a:solidFill>
+              </a:rPr>
               <a:t>→ De caching-mythe: GraphQL is volwassen geworden. De bewering "GraphQL breekt caching" klopt niet meer.</a:t>
             </a:r>
           </a:p>
           <a:p>
             <a:r>
-              <a:rPr sz="1600" b="1"/>
+              <a:rPr sz="1600" b="1">
+                <a:solidFill>
+                  <a:srgbClr val="DAFFDE"/>
+                </a:solidFill>
+              </a:rPr>
               <a:t/>
             </a:r>
           </a:p>
           <a:p>
             <a:r>
-              <a:rPr sz="1600" b="1"/>
+              <a:rPr sz="1600" b="1">
+                <a:solidFill>
+                  <a:srgbClr val="DAFFDE"/>
+                </a:solidFill>
+              </a:rPr>
               <a:t>→ Gelaagde aanpak: Caching vereist een gecoördineerde stack (Client, CDN, Gateway en Applicatie-niveau).</a:t>
             </a:r>
           </a:p>
           <a:p>
             <a:r>
-              <a:rPr sz="1600" b="1"/>
+              <a:rPr sz="1600" b="1">
+                <a:solidFill>
+                  <a:srgbClr val="DAFFDE"/>
+                </a:solidFill>
+              </a:rPr>
               <a:t/>
             </a:r>
           </a:p>
           <a:p>
             <a:r>
-              <a:rPr sz="1600" b="1"/>
+              <a:rPr sz="1600" b="1">
+                <a:solidFill>
+                  <a:srgbClr val="DAFFDE"/>
+                </a:solidFill>
+              </a:rPr>
               <a:t>→ Abstraction Layer: GraphQL blinkt uit als één simplistische interface voor AI-modellen en agents, i.p.v. honderden REST-endpoints.</a:t>
             </a:r>
           </a:p>
@@ -13041,19 +13073,6 @@
       </p:bgPr>
     </p:bg>
     <p:spTree>
-      <p:nvGrpSpPr>
-        <p:cNvPr id="1" name="Shape 209"/>
-        <p:cNvGrpSpPr/>
-        <p:nvPr/>
-      </p:nvGrpSpPr>
-      <p:grpSpPr>
-        <a:xfrm>
-          <a:off x="0" y="0"/>
-          <a:ext cx="0" cy="0"/>
-          <a:chOff x="0" y="0"/>
-          <a:chExt cx="0" cy="0"/>
-        </a:xfrm>
-      </p:grpSpPr>
       <p:pic>
         <p:nvPicPr>
           <p:cNvPr id="210" name="Google Shape;210;p23" descr="image.png"/>
@@ -13135,6 +13154,19 @@
           </a:ln>
         </p:spPr>
       </p:pic>
+      <p:nvGrpSpPr>
+        <p:cNvPr id="1" name="Shape 209"/>
+        <p:cNvGrpSpPr/>
+        <p:nvPr/>
+      </p:nvGrpSpPr>
+      <p:grpSpPr>
+        <a:xfrm>
+          <a:off x="0" y="0"/>
+          <a:ext cx="0" cy="0"/>
+          <a:chOff x="0" y="0"/>
+          <a:chExt cx="0" cy="0"/>
+        </a:xfrm>
+      </p:grpSpPr>
       <p:sp>
         <p:nvSpPr>
           <p:cNvPr id="214" name="TextBox 213"/>
@@ -13158,7 +13190,11 @@
           <a:lstStyle/>
           <a:p>
             <a:r>
-              <a:rPr sz="2800" b="1"/>
+              <a:rPr sz="2800" b="1">
+                <a:solidFill>
+                  <a:srgbClr val="F5F5F5"/>
+                </a:solidFill>
+              </a:rPr>
               <a:t>Mensen of Engines beheren?</a:t>
             </a:r>
           </a:p>
@@ -13187,43 +13223,71 @@
           <a:lstStyle/>
           <a:p>
             <a:r>
-              <a:rPr sz="1600" b="1"/>
+              <a:rPr sz="1600" b="1">
+                <a:solidFill>
+                  <a:srgbClr val="DAFFDE"/>
+                </a:solidFill>
+              </a:rPr>
               <a:t>De transitie in moderne API Governance:</a:t>
             </a:r>
           </a:p>
           <a:p>
             <a:r>
-              <a:rPr sz="1600" b="1"/>
+              <a:rPr sz="1600" b="1">
+                <a:solidFill>
+                  <a:srgbClr val="DAFFDE"/>
+                </a:solidFill>
+              </a:rPr>
               <a:t/>
             </a:r>
           </a:p>
           <a:p>
             <a:r>
-              <a:rPr sz="1600" b="1"/>
+              <a:rPr sz="1600" b="1">
+                <a:solidFill>
+                  <a:srgbClr val="DAFFDE"/>
+                </a:solidFill>
+              </a:rPr>
               <a:t>→ De chaos: Traditionele governance probeert complexe interacties tussen mensen / teams en API’s handmatig te reguleren.</a:t>
             </a:r>
           </a:p>
           <a:p>
             <a:r>
-              <a:rPr sz="1600" b="1"/>
+              <a:rPr sz="1600" b="1">
+                <a:solidFill>
+                  <a:srgbClr val="DAFFDE"/>
+                </a:solidFill>
+              </a:rPr>
               <a:t/>
             </a:r>
           </a:p>
           <a:p>
             <a:r>
-              <a:rPr sz="1600" b="1"/>
+              <a:rPr sz="1600" b="1">
+                <a:solidFill>
+                  <a:srgbClr val="DAFFDE"/>
+                </a:solidFill>
+              </a:rPr>
               <a:t>→ De oplossing: Verschuif de focus naar het inrichten en beheren van platform-engines (de gateways).</a:t>
             </a:r>
           </a:p>
           <a:p>
             <a:r>
-              <a:rPr sz="1600" b="1"/>
+              <a:rPr sz="1600" b="1">
+                <a:solidFill>
+                  <a:srgbClr val="DAFFDE"/>
+                </a:solidFill>
+              </a:rPr>
               <a:t/>
             </a:r>
           </a:p>
           <a:p>
             <a:r>
-              <a:rPr sz="1600" b="1"/>
+              <a:rPr sz="1600" b="1">
+                <a:solidFill>
+                  <a:srgbClr val="DAFFDE"/>
+                </a:solidFill>
+              </a:rPr>
               <a:t>→ Automatische controle: Regels centraal in de 'engine' afdwingen ontlast ontwikkelaars en behoudt grip.</a:t>
             </a:r>
           </a:p>
@@ -13249,19 +13313,6 @@
       </p:bgPr>
     </p:bg>
     <p:spTree>
-      <p:nvGrpSpPr>
-        <p:cNvPr id="1" name="Shape 224"/>
-        <p:cNvGrpSpPr/>
-        <p:nvPr/>
-      </p:nvGrpSpPr>
-      <p:grpSpPr>
-        <a:xfrm>
-          <a:off x="0" y="0"/>
-          <a:ext cx="0" cy="0"/>
-          <a:chOff x="0" y="0"/>
-          <a:chExt cx="0" cy="0"/>
-        </a:xfrm>
-      </p:grpSpPr>
       <p:pic>
         <p:nvPicPr>
           <p:cNvPr id="225" name="Google Shape;225;p24" descr="image.png"/>
@@ -13343,6 +13394,19 @@
           </a:ln>
         </p:spPr>
       </p:pic>
+      <p:nvGrpSpPr>
+        <p:cNvPr id="1" name="Shape 224"/>
+        <p:cNvGrpSpPr/>
+        <p:nvPr/>
+      </p:nvGrpSpPr>
+      <p:grpSpPr>
+        <a:xfrm>
+          <a:off x="0" y="0"/>
+          <a:ext cx="0" cy="0"/>
+          <a:chOff x="0" y="0"/>
+          <a:chExt cx="0" cy="0"/>
+        </a:xfrm>
+      </p:grpSpPr>
       <p:sp>
         <p:nvSpPr>
           <p:cNvPr id="229" name="TextBox 228"/>
@@ -13366,7 +13430,11 @@
           <a:lstStyle/>
           <a:p>
             <a:r>
-              <a:rPr sz="2800" b="1"/>
+              <a:rPr sz="2800" b="1">
+                <a:solidFill>
+                  <a:srgbClr val="F5F5F5"/>
+                </a:solidFill>
+              </a:rPr>
               <a:t>Mocking m.b.v. AI</a:t>
             </a:r>
           </a:p>
@@ -13395,43 +13463,71 @@
           <a:lstStyle/>
           <a:p>
             <a:r>
-              <a:rPr sz="1600" b="1"/>
+              <a:rPr sz="1600" b="1">
+                <a:solidFill>
+                  <a:srgbClr val="DAFFDE"/>
+                </a:solidFill>
+              </a:rPr>
               <a:t>Annotaties sturen de router aan:</a:t>
             </a:r>
           </a:p>
           <a:p>
             <a:r>
-              <a:rPr sz="1600" b="1"/>
+              <a:rPr sz="1600" b="1">
+                <a:solidFill>
+                  <a:srgbClr val="DAFFDE"/>
+                </a:solidFill>
+              </a:rPr>
               <a:t/>
             </a:r>
           </a:p>
           <a:p>
             <a:r>
-              <a:rPr sz="1600" b="1"/>
+              <a:rPr sz="1600" b="1">
+                <a:solidFill>
+                  <a:srgbClr val="DAFFDE"/>
+                </a:solidFill>
+              </a:rPr>
               <a:t>→ De @mock annotatie: Backend-teams annoteren velden die nog niet zijn geïmplementeerd direct in het schema.</a:t>
             </a:r>
           </a:p>
           <a:p>
             <a:r>
-              <a:rPr sz="1600" b="1"/>
+              <a:rPr sz="1600" b="1">
+                <a:solidFill>
+                  <a:srgbClr val="DAFFDE"/>
+                </a:solidFill>
+              </a:rPr>
               <a:t/>
             </a:r>
           </a:p>
           <a:p>
             <a:r>
-              <a:rPr sz="1600" b="1"/>
+              <a:rPr sz="1600" b="1">
+                <a:solidFill>
+                  <a:srgbClr val="DAFFDE"/>
+                </a:solidFill>
+              </a:rPr>
               <a:t>→ AI-gegenereerd: De router interpreteert de annotatie en genereert realistische, domein-specifieke mockdata.</a:t>
             </a:r>
           </a:p>
           <a:p>
             <a:r>
-              <a:rPr sz="1600" b="1"/>
+              <a:rPr sz="1600" b="1">
+                <a:solidFill>
+                  <a:srgbClr val="DAFFDE"/>
+                </a:solidFill>
+              </a:rPr>
               <a:t/>
             </a:r>
           </a:p>
           <a:p>
             <a:r>
-              <a:rPr sz="1600" b="1"/>
+              <a:rPr sz="1600" b="1">
+                <a:solidFill>
+                  <a:srgbClr val="DAFFDE"/>
+                </a:solidFill>
+              </a:rPr>
               <a:t>→ Voorbeeld: `@mock(source: "llm" hint: "Amsterdam hotel")` levert direct betekenisvolle UI-vulling op.</a:t>
             </a:r>
           </a:p>
@@ -13457,19 +13553,6 @@
       </p:bgPr>
     </p:bg>
     <p:spTree>
-      <p:nvGrpSpPr>
-        <p:cNvPr id="1" name="Shape 239"/>
-        <p:cNvGrpSpPr/>
-        <p:nvPr/>
-      </p:nvGrpSpPr>
-      <p:grpSpPr>
-        <a:xfrm>
-          <a:off x="0" y="0"/>
-          <a:ext cx="0" cy="0"/>
-          <a:chOff x="0" y="0"/>
-          <a:chExt cx="0" cy="0"/>
-        </a:xfrm>
-      </p:grpSpPr>
       <p:pic>
         <p:nvPicPr>
           <p:cNvPr id="240" name="Google Shape;240;p25" descr="image.png"/>
@@ -13551,6 +13634,19 @@
           </a:ln>
         </p:spPr>
       </p:pic>
+      <p:nvGrpSpPr>
+        <p:cNvPr id="1" name="Shape 239"/>
+        <p:cNvGrpSpPr/>
+        <p:nvPr/>
+      </p:nvGrpSpPr>
+      <p:grpSpPr>
+        <a:xfrm>
+          <a:off x="0" y="0"/>
+          <a:ext cx="0" cy="0"/>
+          <a:chOff x="0" y="0"/>
+          <a:chExt cx="0" cy="0"/>
+        </a:xfrm>
+      </p:grpSpPr>
       <p:sp>
         <p:nvSpPr>
           <p:cNvPr id="243" name="TextBox 242"/>
@@ -13574,7 +13670,11 @@
           <a:lstStyle/>
           <a:p>
             <a:r>
-              <a:rPr sz="2800" b="1"/>
+              <a:rPr sz="2800" b="1">
+                <a:solidFill>
+                  <a:srgbClr val="F5F5F5"/>
+                </a:solidFill>
+              </a:rPr>
               <a:t>Platform Engineering 2026</a:t>
             </a:r>
           </a:p>
@@ -13603,67 +13703,111 @@
           <a:lstStyle/>
           <a:p>
             <a:r>
-              <a:rPr sz="1600" b="1"/>
+              <a:rPr sz="1600" b="1">
+                <a:solidFill>
+                  <a:srgbClr val="DAFFDE"/>
+                </a:solidFill>
+              </a:rPr>
               <a:t>Alice Roquette (TomTom)</a:t>
             </a:r>
           </a:p>
           <a:p>
             <a:r>
-              <a:rPr sz="1600" b="1"/>
+              <a:rPr sz="1600" b="1">
+                <a:solidFill>
+                  <a:srgbClr val="DAFFDE"/>
+                </a:solidFill>
+              </a:rPr>
               <a:t/>
             </a:r>
           </a:p>
           <a:p>
             <a:r>
-              <a:rPr sz="1600" b="1"/>
+              <a:rPr sz="1600" b="1">
+                <a:solidFill>
+                  <a:srgbClr val="DAFFDE"/>
+                </a:solidFill>
+              </a:rPr>
               <a:t>→ Uitgebreide discussie over API-governance, gateways en complexe re-engineering binnen een platform-omgeving.</a:t>
             </a:r>
           </a:p>
           <a:p>
             <a:r>
-              <a:rPr sz="1600" b="1"/>
+              <a:rPr sz="1600" b="1">
+                <a:solidFill>
+                  <a:srgbClr val="DAFFDE"/>
+                </a:solidFill>
+              </a:rPr>
               <a:t/>
             </a:r>
           </a:p>
           <a:p>
             <a:r>
-              <a:rPr sz="1600" b="1"/>
+              <a:rPr sz="1600" b="1">
+                <a:solidFill>
+                  <a:srgbClr val="DAFFDE"/>
+                </a:solidFill>
+              </a:rPr>
               <a:t>→ Platform engineering is de lijm tussen de technische architectuur en de uiteindelijke developer experience.</a:t>
             </a:r>
           </a:p>
           <a:p>
             <a:r>
-              <a:rPr sz="1600" b="1"/>
+              <a:rPr sz="1600" b="1">
+                <a:solidFill>
+                  <a:srgbClr val="DAFFDE"/>
+                </a:solidFill>
+              </a:rPr>
               <a:t/>
             </a:r>
           </a:p>
           <a:p>
             <a:r>
-              <a:rPr sz="1600" b="1"/>
+              <a:rPr sz="1600" b="1">
+                <a:solidFill>
+                  <a:srgbClr val="DAFFDE"/>
+                </a:solidFill>
+              </a:rPr>
               <a:t>→ De DevOps AI Chatroom</a:t>
             </a:r>
           </a:p>
           <a:p>
             <a:r>
-              <a:rPr sz="1600" b="1"/>
+              <a:rPr sz="1600" b="1">
+                <a:solidFill>
+                  <a:srgbClr val="DAFFDE"/>
+                </a:solidFill>
+              </a:rPr>
               <a:t/>
             </a:r>
           </a:p>
           <a:p>
             <a:r>
-              <a:rPr sz="1600" b="1"/>
+              <a:rPr sz="1600" b="1">
+                <a:solidFill>
+                  <a:srgbClr val="DAFFDE"/>
+                </a:solidFill>
+              </a:rPr>
               <a:t>→ Een bijzonder initiatief van jonge engineers: een discord-chatroom waar teams samen AI-prompts sturen en de complete prompt-historie opslaan.</a:t>
             </a:r>
           </a:p>
           <a:p>
             <a:r>
-              <a:rPr sz="1600" b="1"/>
+              <a:rPr sz="1600" b="1">
+                <a:solidFill>
+                  <a:srgbClr val="DAFFDE"/>
+                </a:solidFill>
+              </a:rPr>
               <a:t/>
             </a:r>
           </a:p>
           <a:p>
             <a:r>
-              <a:rPr sz="1600" b="1"/>
+              <a:rPr sz="1600" b="1">
+                <a:solidFill>
+                  <a:srgbClr val="DAFFDE"/>
+                </a:solidFill>
+              </a:rPr>
               <a:t>→ Waarom: Dit herontdekt de "waarom" achter het ontwerp van systemen. De herontdekking van specs, maar dan organisch.</a:t>
             </a:r>
           </a:p>
@@ -13689,19 +13833,6 @@
       </p:bgPr>
     </p:bg>
     <p:spTree>
-      <p:nvGrpSpPr>
-        <p:cNvPr id="1" name="Shape 253"/>
-        <p:cNvGrpSpPr/>
-        <p:nvPr/>
-      </p:nvGrpSpPr>
-      <p:grpSpPr>
-        <a:xfrm>
-          <a:off x="0" y="0"/>
-          <a:ext cx="0" cy="0"/>
-          <a:chOff x="0" y="0"/>
-          <a:chExt cx="0" cy="0"/>
-        </a:xfrm>
-      </p:grpSpPr>
       <p:pic>
         <p:nvPicPr>
           <p:cNvPr id="254" name="Google Shape;254;p26" descr="image.png"/>
@@ -13756,6 +13887,19 @@
           </a:ln>
         </p:spPr>
       </p:pic>
+      <p:nvGrpSpPr>
+        <p:cNvPr id="1" name="Shape 253"/>
+        <p:cNvGrpSpPr/>
+        <p:nvPr/>
+      </p:nvGrpSpPr>
+      <p:grpSpPr>
+        <a:xfrm>
+          <a:off x="0" y="0"/>
+          <a:ext cx="0" cy="0"/>
+          <a:chOff x="0" y="0"/>
+          <a:chExt cx="0" cy="0"/>
+        </a:xfrm>
+      </p:grpSpPr>
       <p:sp>
         <p:nvSpPr>
           <p:cNvPr id="264" name="TextBox 263"/>
@@ -13779,7 +13923,11 @@
           <a:lstStyle/>
           <a:p>
             <a:r>
-              <a:rPr sz="2800" b="1"/>
+              <a:rPr sz="2800" b="1">
+                <a:solidFill>
+                  <a:srgbClr val="F5F5F5"/>
+                </a:solidFill>
+              </a:rPr>
               <a:t>AsyncAPI Event-Sturing</a:t>
             </a:r>
           </a:p>
@@ -13808,43 +13956,71 @@
           <a:lstStyle/>
           <a:p>
             <a:r>
-              <a:rPr sz="1600" b="1"/>
+              <a:rPr sz="1600" b="1">
+                <a:solidFill>
+                  <a:srgbClr val="DAFFDE"/>
+                </a:solidFill>
+              </a:rPr>
               <a:t>Lukasz Gornicki (AsyncAPI Maintainer):</a:t>
             </a:r>
           </a:p>
           <a:p>
             <a:r>
-              <a:rPr sz="1600" b="1"/>
+              <a:rPr sz="1600" b="1">
+                <a:solidFill>
+                  <a:srgbClr val="DAFFDE"/>
+                </a:solidFill>
+              </a:rPr>
               <a:t/>
             </a:r>
           </a:p>
           <a:p>
             <a:r>
-              <a:rPr sz="1600" b="1"/>
+              <a:rPr sz="1600" b="1">
+                <a:solidFill>
+                  <a:srgbClr val="DAFFDE"/>
+                </a:solidFill>
+              </a:rPr>
               <a:t>→ De Omhulling telt: Lukasz benadrukte dat het payload-schema zelf secundair is; AsyncAPI definieert de interactie en kanalen (Kafka, MQTT).</a:t>
             </a:r>
           </a:p>
           <a:p>
             <a:r>
-              <a:rPr sz="1600" b="1"/>
+              <a:rPr sz="1600" b="1">
+                <a:solidFill>
+                  <a:srgbClr val="DAFFDE"/>
+                </a:solidFill>
+              </a:rPr>
               <a:t/>
             </a:r>
           </a:p>
           <a:p>
             <a:r>
-              <a:rPr sz="1600" b="1"/>
+              <a:rPr sz="1600" b="1">
+                <a:solidFill>
+                  <a:srgbClr val="DAFFDE"/>
+                </a:solidFill>
+              </a:rPr>
               <a:t>→ Consistentie voor Events: Brengt dezelfde structuur en developer experience naar event-driven systemen als OpenAPI deed voor REST.</a:t>
             </a:r>
           </a:p>
           <a:p>
             <a:r>
-              <a:rPr sz="1600" b="1"/>
+              <a:rPr sz="1600" b="1">
+                <a:solidFill>
+                  <a:srgbClr val="DAFFDE"/>
+                </a:solidFill>
+              </a:rPr>
               <a:t/>
             </a:r>
           </a:p>
           <a:p>
             <a:r>
-              <a:rPr sz="1600" b="1"/>
+              <a:rPr sz="1600" b="1">
+                <a:solidFill>
+                  <a:srgbClr val="DAFFDE"/>
+                </a:solidFill>
+              </a:rPr>
               <a:t>→ Tooling Ecosysteem: Snelle groei in open-source code-generatoren en validatie-pipelines.</a:t>
             </a:r>
           </a:p>
@@ -13870,19 +14046,6 @@
       </p:bgPr>
     </p:bg>
     <p:spTree>
-      <p:nvGrpSpPr>
-        <p:cNvPr id="1" name="Shape 267"/>
-        <p:cNvGrpSpPr/>
-        <p:nvPr/>
-      </p:nvGrpSpPr>
-      <p:grpSpPr>
-        <a:xfrm>
-          <a:off x="0" y="0"/>
-          <a:ext cx="0" cy="0"/>
-          <a:chOff x="0" y="0"/>
-          <a:chExt cx="0" cy="0"/>
-        </a:xfrm>
-      </p:grpSpPr>
       <p:pic>
         <p:nvPicPr>
           <p:cNvPr id="268" name="Google Shape;268;p27" descr="image.png"/>
@@ -13964,6 +14127,19 @@
           </a:ln>
         </p:spPr>
       </p:pic>
+      <p:nvGrpSpPr>
+        <p:cNvPr id="1" name="Shape 267"/>
+        <p:cNvGrpSpPr/>
+        <p:nvPr/>
+      </p:nvGrpSpPr>
+      <p:grpSpPr>
+        <a:xfrm>
+          <a:off x="0" y="0"/>
+          <a:ext cx="0" cy="0"/>
+          <a:chOff x="0" y="0"/>
+          <a:chExt cx="0" cy="0"/>
+        </a:xfrm>
+      </p:grpSpPr>
       <p:sp>
         <p:nvSpPr>
           <p:cNvPr id="272" name="TextBox 271"/>
@@ -13987,7 +14163,11 @@
           <a:lstStyle/>
           <a:p>
             <a:r>
-              <a:rPr sz="2800" b="1"/>
+              <a:rPr sz="2800" b="1">
+                <a:solidFill>
+                  <a:srgbClr val="F5F5F5"/>
+                </a:solidFill>
+              </a:rPr>
               <a:t>Ask AsyncAPI AI Interface</a:t>
             </a:r>
           </a:p>
@@ -14016,55 +14196,91 @@
           <a:lstStyle/>
           <a:p>
             <a:r>
-              <a:rPr sz="1600" b="1"/>
+              <a:rPr sz="1600" b="1">
+                <a:solidFill>
+                  <a:srgbClr val="DAFFDE"/>
+                </a:solidFill>
+              </a:rPr>
               <a:t>Interactieve AI assistent voor AsyncAPI:</a:t>
             </a:r>
           </a:p>
           <a:p>
             <a:r>
-              <a:rPr sz="1600" b="1"/>
+              <a:rPr sz="1600" b="1">
+                <a:solidFill>
+                  <a:srgbClr val="DAFFDE"/>
+                </a:solidFill>
+              </a:rPr>
               <a:t/>
             </a:r>
           </a:p>
           <a:p>
             <a:r>
-              <a:rPr sz="1600" b="1"/>
+              <a:rPr sz="1600" b="1">
+                <a:solidFill>
+                  <a:srgbClr val="DAFFDE"/>
+                </a:solidFill>
+              </a:rPr>
               <a:t>→ Laagdrempelig: Beantwoordt vragen over de specificatie, concepten en protocollen direct vanuit de officiële documentatie.</a:t>
             </a:r>
           </a:p>
           <a:p>
             <a:r>
-              <a:rPr sz="1600" b="1"/>
+              <a:rPr sz="1600" b="1">
+                <a:solidFill>
+                  <a:srgbClr val="DAFFDE"/>
+                </a:solidFill>
+              </a:rPr>
               <a:t/>
             </a:r>
           </a:p>
           <a:p>
             <a:r>
-              <a:rPr sz="1600" b="1"/>
+              <a:rPr sz="1600" b="1">
+                <a:solidFill>
+                  <a:srgbClr val="DAFFDE"/>
+                </a:solidFill>
+              </a:rPr>
               <a:t>→ Echte passie: "AsyncAPI is built by people with passion, not large corporate funding."</a:t>
             </a:r>
           </a:p>
           <a:p>
             <a:r>
-              <a:rPr sz="1600" b="1"/>
+              <a:rPr sz="1600" b="1">
+                <a:solidFill>
+                  <a:srgbClr val="DAFFDE"/>
+                </a:solidFill>
+              </a:rPr>
               <a:t/>
             </a:r>
           </a:p>
           <a:p>
             <a:r>
-              <a:rPr sz="1600" b="1"/>
+              <a:rPr sz="1600" b="1">
+                <a:solidFill>
+                  <a:srgbClr val="DAFFDE"/>
+                </a:solidFill>
+              </a:rPr>
               <a:t>→ Follow-up: Tevens kort met het GraphQL team gesproken en een vervolgafspraak ingepland om ervaringen uit te wisselen!</a:t>
             </a:r>
           </a:p>
           <a:p>
             <a:r>
-              <a:rPr sz="1600" b="1"/>
+              <a:rPr sz="1600" b="1">
+                <a:solidFill>
+                  <a:srgbClr val="DAFFDE"/>
+                </a:solidFill>
+              </a:rPr>
               <a:t/>
             </a:r>
           </a:p>
           <a:p>
             <a:r>
-              <a:rPr sz="1600" b="1"/>
+              <a:rPr sz="1600" b="1">
+                <a:solidFill>
+                  <a:srgbClr val="DAFFDE"/>
+                </a:solidFill>
+              </a:rPr>
               <a:t>→ askasyncapi.brainfart.dev</a:t>
             </a:r>
           </a:p>
@@ -14168,19 +14384,6 @@
       </p:bgPr>
     </p:bg>
     <p:spTree>
-      <p:nvGrpSpPr>
-        <p:cNvPr id="1" name="Shape 282"/>
-        <p:cNvGrpSpPr/>
-        <p:nvPr/>
-      </p:nvGrpSpPr>
-      <p:grpSpPr>
-        <a:xfrm>
-          <a:off x="0" y="0"/>
-          <a:ext cx="0" cy="0"/>
-          <a:chOff x="0" y="0"/>
-          <a:chExt cx="0" cy="0"/>
-        </a:xfrm>
-      </p:grpSpPr>
       <p:pic>
         <p:nvPicPr>
           <p:cNvPr id="283" name="Google Shape;283;p28" descr="image.png"/>
@@ -14208,6 +14411,19 @@
           </a:ln>
         </p:spPr>
       </p:pic>
+      <p:nvGrpSpPr>
+        <p:cNvPr id="1" name="Shape 282"/>
+        <p:cNvGrpSpPr/>
+        <p:nvPr/>
+      </p:nvGrpSpPr>
+      <p:grpSpPr>
+        <a:xfrm>
+          <a:off x="0" y="0"/>
+          <a:ext cx="0" cy="0"/>
+          <a:chOff x="0" y="0"/>
+          <a:chExt cx="0" cy="0"/>
+        </a:xfrm>
+      </p:grpSpPr>
       <p:sp>
         <p:nvSpPr>
           <p:cNvPr id="284" name="TextBox 283"/>
@@ -14231,7 +14447,11 @@
           <a:lstStyle/>
           <a:p>
             <a:r>
-              <a:rPr sz="2800" b="1"/>
+              <a:rPr sz="2800" b="1">
+                <a:solidFill>
+                  <a:srgbClr val="F5F5F5"/>
+                </a:solidFill>
+              </a:rPr>
               <a:t>De Toekomst van Software</a:t>
             </a:r>
           </a:p>
@@ -14260,25 +14480,41 @@
           <a:lstStyle/>
           <a:p>
             <a:r>
-              <a:rPr sz="1600" b="1"/>
+              <a:rPr sz="1600" b="1">
+                <a:solidFill>
+                  <a:srgbClr val="DAFFDE"/>
+                </a:solidFill>
+              </a:rPr>
               <a:t>De menselijke maat is essentieel bij het gebruik van AI. Blijf zelf specificeren en ontwerpen. Bedenk zelf wat je wilt bouwen — anders wordt alles uiteindelijk een identieke gemeenplaats. Blijf nadenken: dat is wat wij mensen nog steeds als de beste kunnen.</a:t>
             </a:r>
           </a:p>
           <a:p>
             <a:r>
-              <a:rPr sz="1600" b="1"/>
+              <a:rPr sz="1600" b="1">
+                <a:solidFill>
+                  <a:srgbClr val="DAFFDE"/>
+                </a:solidFill>
+              </a:rPr>
               <a:t>"</a:t>
             </a:r>
           </a:p>
           <a:p>
             <a:r>
-              <a:rPr sz="1600" b="1"/>
+              <a:rPr sz="1600" b="1">
+                <a:solidFill>
+                  <a:srgbClr val="DAFFDE"/>
+                </a:solidFill>
+              </a:rPr>
               <a:t/>
             </a:r>
           </a:p>
           <a:p>
             <a:r>
-              <a:rPr sz="1600" b="1"/>
+              <a:rPr sz="1600" b="1">
+                <a:solidFill>
+                  <a:srgbClr val="DAFFDE"/>
+                </a:solidFill>
+              </a:rPr>
               <a:t>→ — Paneldiscussie met Mark Boyd, Erik Wilde, Kristen Womack &amp; Alice Roquette</a:t>
             </a:r>
           </a:p>
@@ -14304,19 +14540,6 @@
       </p:bgPr>
     </p:bg>
     <p:spTree>
-      <p:nvGrpSpPr>
-        <p:cNvPr id="1" name="Shape 292"/>
-        <p:cNvGrpSpPr/>
-        <p:nvPr/>
-      </p:nvGrpSpPr>
-      <p:grpSpPr>
-        <a:xfrm>
-          <a:off x="0" y="0"/>
-          <a:ext cx="0" cy="0"/>
-          <a:chOff x="0" y="0"/>
-          <a:chExt cx="0" cy="0"/>
-        </a:xfrm>
-      </p:grpSpPr>
       <p:pic>
         <p:nvPicPr>
           <p:cNvPr id="293" name="Google Shape;293;p29" descr="image.png"/>
@@ -14344,6 +14567,19 @@
           </a:ln>
         </p:spPr>
       </p:pic>
+      <p:nvGrpSpPr>
+        <p:cNvPr id="1" name="Shape 292"/>
+        <p:cNvGrpSpPr/>
+        <p:nvPr/>
+      </p:nvGrpSpPr>
+      <p:grpSpPr>
+        <a:xfrm>
+          <a:off x="0" y="0"/>
+          <a:ext cx="0" cy="0"/>
+          <a:chOff x="0" y="0"/>
+          <a:chExt cx="0" cy="0"/>
+        </a:xfrm>
+      </p:grpSpPr>
       <p:sp>
         <p:nvSpPr>
           <p:cNvPr id="294" name="TextBox 293"/>
@@ -14367,7 +14603,11 @@
           <a:lstStyle/>
           <a:p>
             <a:r>
-              <a:rPr sz="2800" b="1"/>
+              <a:rPr sz="2800" b="1">
+                <a:solidFill>
+                  <a:srgbClr val="F5F5F5"/>
+                </a:solidFill>
+              </a:rPr>
               <a:t>Vragen &amp; Discussie</a:t>
             </a:r>
           </a:p>
@@ -14396,19 +14636,31 @@
           <a:lstStyle/>
           <a:p>
             <a:r>
-              <a:rPr sz="1600" b="1"/>
+              <a:rPr sz="1600" b="1">
+                <a:solidFill>
+                  <a:srgbClr val="DAFFDE"/>
+                </a:solidFill>
+              </a:rPr>
               <a:t>Hoe vertalen we deze lessen over menselijke regie, AI-mocking en platform-governance naar onze eigen visie?</a:t>
             </a:r>
           </a:p>
           <a:p>
             <a:r>
-              <a:rPr sz="1600" b="1"/>
+              <a:rPr sz="1600" b="1">
+                <a:solidFill>
+                  <a:srgbClr val="DAFFDE"/>
+                </a:solidFill>
+              </a:rPr>
               <a:t/>
             </a:r>
           </a:p>
           <a:p>
             <a:r>
-              <a:rPr sz="1600" b="1"/>
+              <a:rPr sz="1600" b="1">
+                <a:solidFill>
+                  <a:srgbClr val="DAFFDE"/>
+                </a:solidFill>
+              </a:rPr>
               <a:t>→ Dank voor jullie aandacht en bijdrage!</a:t>
             </a:r>
           </a:p>
@@ -16368,19 +16620,6 @@
       </p:bgPr>
     </p:bg>
     <p:spTree>
-      <p:nvGrpSpPr>
-        <p:cNvPr id="1" name="Shape 128"/>
-        <p:cNvGrpSpPr/>
-        <p:nvPr/>
-      </p:nvGrpSpPr>
-      <p:grpSpPr>
-        <a:xfrm>
-          <a:off x="0" y="0"/>
-          <a:ext cx="0" cy="0"/>
-          <a:chOff x="0" y="0"/>
-          <a:chExt cx="0" cy="0"/>
-        </a:xfrm>
-      </p:grpSpPr>
       <p:pic>
         <p:nvPicPr>
           <p:cNvPr id="129" name="Google Shape;129;p17" descr="image.png"/>
@@ -16462,6 +16701,19 @@
           </a:ln>
         </p:spPr>
       </p:pic>
+      <p:nvGrpSpPr>
+        <p:cNvPr id="1" name="Shape 128"/>
+        <p:cNvGrpSpPr/>
+        <p:nvPr/>
+      </p:nvGrpSpPr>
+      <p:grpSpPr>
+        <a:xfrm>
+          <a:off x="0" y="0"/>
+          <a:ext cx="0" cy="0"/>
+          <a:chOff x="0" y="0"/>
+          <a:chExt cx="0" cy="0"/>
+        </a:xfrm>
+      </p:grpSpPr>
       <p:sp>
         <p:nvSpPr>
           <p:cNvPr id="133" name="TextBox 132"/>
@@ -16485,7 +16737,11 @@
           <a:lstStyle/>
           <a:p>
             <a:r>
-              <a:rPr sz="2800" b="1"/>
+              <a:rPr sz="2800" b="1">
+                <a:solidFill>
+                  <a:srgbClr val="F5F5F5"/>
+                </a:solidFill>
+              </a:rPr>
               <a:t>De Transformatielaag</a:t>
             </a:r>
           </a:p>
@@ -16514,43 +16770,71 @@
           <a:lstStyle/>
           <a:p>
             <a:r>
-              <a:rPr sz="1600" b="1"/>
+              <a:rPr sz="1600" b="1">
+                <a:solidFill>
+                  <a:srgbClr val="DAFFDE"/>
+                </a:solidFill>
+              </a:rPr>
               <a:t>Noodzaak voor een gateway/tussenlaag (KrakenD):</a:t>
             </a:r>
           </a:p>
           <a:p>
             <a:r>
-              <a:rPr sz="1600" b="1"/>
+              <a:rPr sz="1600" b="1">
+                <a:solidFill>
+                  <a:srgbClr val="DAFFDE"/>
+                </a:solidFill>
+              </a:rPr>
               <a:t/>
             </a:r>
           </a:p>
           <a:p>
             <a:r>
-              <a:rPr sz="1600" b="1"/>
+              <a:rPr sz="1600" b="1">
+                <a:solidFill>
+                  <a:srgbClr val="DAFFDE"/>
+                </a:solidFill>
+              </a:rPr>
               <a:t>→ Ontkoppeling: Transformeer payloads, pas rate-limiting toe en valideer autorisatie direct in de gateway-laag.</a:t>
             </a:r>
           </a:p>
           <a:p>
             <a:r>
-              <a:rPr sz="1600" b="1"/>
+              <a:rPr sz="1600" b="1">
+                <a:solidFill>
+                  <a:srgbClr val="DAFFDE"/>
+                </a:solidFill>
+              </a:rPr>
               <a:t/>
             </a:r>
           </a:p>
           <a:p>
             <a:r>
-              <a:rPr sz="1600" b="1"/>
+              <a:rPr sz="1600" b="1">
+                <a:solidFill>
+                  <a:srgbClr val="DAFFDE"/>
+                </a:solidFill>
+              </a:rPr>
               <a:t>→ KrakenD Open Source: Een krachtige engine om calls on-the-fly en direct in de gateway te manipuleren.</a:t>
             </a:r>
           </a:p>
           <a:p>
             <a:r>
-              <a:rPr sz="1600" b="1"/>
+              <a:rPr sz="1600" b="1">
+                <a:solidFill>
+                  <a:srgbClr val="DAFFDE"/>
+                </a:solidFill>
+              </a:rPr>
               <a:t/>
             </a:r>
           </a:p>
           <a:p>
             <a:r>
-              <a:rPr sz="1600" b="1"/>
+              <a:rPr sz="1600" b="1">
+                <a:solidFill>
+                  <a:srgbClr val="DAFFDE"/>
+                </a:solidFill>
+              </a:rPr>
               <a:t>→ Multi-Backend Aggregation: Voeg meerdere losse endpoints samen tot één beheersbaar en consistent interface.</a:t>
             </a:r>
           </a:p>
@@ -16576,19 +16860,6 @@
       </p:bgPr>
     </p:bg>
     <p:spTree>
-      <p:nvGrpSpPr>
-        <p:cNvPr id="1" name="Shape 143"/>
-        <p:cNvGrpSpPr/>
-        <p:nvPr/>
-      </p:nvGrpSpPr>
-      <p:grpSpPr>
-        <a:xfrm>
-          <a:off x="0" y="0"/>
-          <a:ext cx="0" cy="0"/>
-          <a:chOff x="0" y="0"/>
-          <a:chExt cx="0" cy="0"/>
-        </a:xfrm>
-      </p:grpSpPr>
       <p:pic>
         <p:nvPicPr>
           <p:cNvPr id="144" name="Google Shape;144;p18" descr="image.png"/>
@@ -16670,6 +16941,19 @@
           </a:ln>
         </p:spPr>
       </p:pic>
+      <p:nvGrpSpPr>
+        <p:cNvPr id="1" name="Shape 143"/>
+        <p:cNvGrpSpPr/>
+        <p:nvPr/>
+      </p:nvGrpSpPr>
+      <p:grpSpPr>
+        <a:xfrm>
+          <a:off x="0" y="0"/>
+          <a:ext cx="0" cy="0"/>
+          <a:chOff x="0" y="0"/>
+          <a:chExt cx="0" cy="0"/>
+        </a:xfrm>
+      </p:grpSpPr>
       <p:sp>
         <p:nvSpPr>
           <p:cNvPr id="147" name="TextBox 146"/>
@@ -16693,7 +16977,11 @@
           <a:lstStyle/>
           <a:p>
             <a:r>
-              <a:rPr sz="2800" b="1"/>
+              <a:rPr sz="2800" b="1">
+                <a:solidFill>
+                  <a:srgbClr val="F5F5F5"/>
+                </a:solidFill>
+              </a:rPr>
               <a:t>Het Nationaal Schema Register</a:t>
             </a:r>
           </a:p>
@@ -16722,67 +17010,111 @@
           <a:lstStyle/>
           <a:p>
             <a:r>
-              <a:rPr sz="1600" b="1"/>
+              <a:rPr sz="1600" b="1">
+                <a:solidFill>
+                  <a:srgbClr val="DAFFDE"/>
+                </a:solidFill>
+              </a:rPr>
               <a:t>Het Goede Initiatief</a:t>
             </a:r>
           </a:p>
           <a:p>
             <a:r>
-              <a:rPr sz="1600" b="1"/>
+              <a:rPr sz="1600" b="1">
+                <a:solidFill>
+                  <a:srgbClr val="DAFFDE"/>
+                </a:solidFill>
+              </a:rPr>
               <a:t/>
             </a:r>
           </a:p>
           <a:p>
             <a:r>
-              <a:rPr sz="1600" b="1"/>
+              <a:rPr sz="1600" b="1">
+                <a:solidFill>
+                  <a:srgbClr val="DAFFDE"/>
+                </a:solidFill>
+              </a:rPr>
               <a:t>→ Dimitri van Hees (Geonovum) presenteerde een register om OpenAPI- en JSON-schema's centraal te ontsluiten voor de overheid.</a:t>
             </a:r>
           </a:p>
           <a:p>
             <a:r>
-              <a:rPr sz="1600" b="1"/>
+              <a:rPr sz="1600" b="1">
+                <a:solidFill>
+                  <a:srgbClr val="DAFFDE"/>
+                </a:solidFill>
+              </a:rPr>
               <a:t/>
             </a:r>
           </a:p>
           <a:p>
             <a:r>
-              <a:rPr sz="1600" b="1"/>
+              <a:rPr sz="1600" b="1">
+                <a:solidFill>
+                  <a:srgbClr val="DAFFDE"/>
+                </a:solidFill>
+              </a:rPr>
               <a:t>→ Dit stimuleert hergebruik en standaardisatie van dataspecificaties over overheidsgrenzen heen.</a:t>
             </a:r>
           </a:p>
           <a:p>
             <a:r>
-              <a:rPr sz="1600" b="1"/>
+              <a:rPr sz="1600" b="1">
+                <a:solidFill>
+                  <a:srgbClr val="DAFFDE"/>
+                </a:solidFill>
+              </a:rPr>
               <a:t/>
             </a:r>
           </a:p>
           <a:p>
             <a:r>
-              <a:rPr sz="1600" b="1"/>
+              <a:rPr sz="1600" b="1">
+                <a:solidFill>
+                  <a:srgbClr val="DAFFDE"/>
+                </a:solidFill>
+              </a:rPr>
               <a:t>→ Kritiek: De 'Grabbelton'</a:t>
             </a:r>
           </a:p>
           <a:p>
             <a:r>
-              <a:rPr sz="1600" b="1"/>
+              <a:rPr sz="1600" b="1">
+                <a:solidFill>
+                  <a:srgbClr val="DAFFDE"/>
+                </a:solidFill>
+              </a:rPr>
               <a:t/>
             </a:r>
           </a:p>
           <a:p>
             <a:r>
-              <a:rPr sz="1600" b="1"/>
+              <a:rPr sz="1600" b="1">
+                <a:solidFill>
+                  <a:srgbClr val="DAFFDE"/>
+                </a:solidFill>
+              </a:rPr>
               <a:t>→ Het register mist op dit moment nog een goede visuele representatie. Het voelt nu als een grote vergaarbak zonder heldere context.</a:t>
             </a:r>
           </a:p>
           <a:p>
             <a:r>
-              <a:rPr sz="1600" b="1"/>
+              <a:rPr sz="1600" b="1">
+                <a:solidFill>
+                  <a:srgbClr val="DAFFDE"/>
+                </a:solidFill>
+              </a:rPr>
               <a:t/>
             </a:r>
           </a:p>
           <a:p>
             <a:r>
-              <a:rPr sz="1600" b="1"/>
+              <a:rPr sz="1600" b="1">
+                <a:solidFill>
+                  <a:srgbClr val="DAFFDE"/>
+                </a:solidFill>
+              </a:rPr>
               <a:t>→ Een kans: Onze UML/objecttypen POC in React kan hier uitstekend bij helpen om semantisch begrip visueel te maken! Ik ga Dimitri benaderen.</a:t>
             </a:r>
           </a:p>
@@ -16808,19 +17140,6 @@
       </p:bgPr>
     </p:bg>
     <p:spTree>
-      <p:nvGrpSpPr>
-        <p:cNvPr id="1" name="Shape 157"/>
-        <p:cNvGrpSpPr/>
-        <p:nvPr/>
-      </p:nvGrpSpPr>
-      <p:grpSpPr>
-        <a:xfrm>
-          <a:off x="0" y="0"/>
-          <a:ext cx="0" cy="0"/>
-          <a:chOff x="0" y="0"/>
-          <a:chExt cx="0" cy="0"/>
-        </a:xfrm>
-      </p:grpSpPr>
       <p:pic>
         <p:nvPicPr>
           <p:cNvPr id="158" name="Google Shape;158;p19" descr="image.png"/>
@@ -16875,6 +17194,19 @@
           </a:ln>
         </p:spPr>
       </p:pic>
+      <p:nvGrpSpPr>
+        <p:cNvPr id="1" name="Shape 157"/>
+        <p:cNvGrpSpPr/>
+        <p:nvPr/>
+      </p:nvGrpSpPr>
+      <p:grpSpPr>
+        <a:xfrm>
+          <a:off x="0" y="0"/>
+          <a:ext cx="0" cy="0"/>
+          <a:chOff x="0" y="0"/>
+          <a:chExt cx="0" cy="0"/>
+        </a:xfrm>
+      </p:grpSpPr>
       <p:sp>
         <p:nvSpPr>
           <p:cNvPr id="168" name="TextBox 167"/>
@@ -16898,7 +17230,11 @@
           <a:lstStyle/>
           <a:p>
             <a:r>
-              <a:rPr sz="2800" b="1"/>
+              <a:rPr sz="2800" b="1">
+                <a:solidFill>
+                  <a:srgbClr val="F5F5F5"/>
+                </a:solidFill>
+              </a:rPr>
               <a:t>API-Sturing in Italië</a:t>
             </a:r>
           </a:p>
@@ -16927,43 +17263,71 @@
           <a:lstStyle/>
           <a:p>
             <a:r>
-              <a:rPr sz="1600" b="1"/>
+              <a:rPr sz="1600" b="1">
+                <a:solidFill>
+                  <a:srgbClr val="DAFFDE"/>
+                </a:solidFill>
+              </a:rPr>
               <a:t>Roberto Polli over de Italiaanse aanpak:</a:t>
             </a:r>
           </a:p>
           <a:p>
             <a:r>
-              <a:rPr sz="1600" b="1"/>
+              <a:rPr sz="1600" b="1">
+                <a:solidFill>
+                  <a:srgbClr val="DAFFDE"/>
+                </a:solidFill>
+              </a:rPr>
               <a:t/>
             </a:r>
           </a:p>
           <a:p>
             <a:r>
-              <a:rPr sz="1600" b="1"/>
+              <a:rPr sz="1600" b="1">
+                <a:solidFill>
+                  <a:srgbClr val="DAFFDE"/>
+                </a:solidFill>
+              </a:rPr>
               <a:t>→ Federatieve uitdaging: Italië heeft te maken met 20 autonome regio's en meer dan 8000 gemeenten met elk eigen regels.</a:t>
             </a:r>
           </a:p>
           <a:p>
             <a:r>
-              <a:rPr sz="1600" b="1"/>
+              <a:rPr sz="1600" b="1">
+                <a:solidFill>
+                  <a:srgbClr val="DAFFDE"/>
+                </a:solidFill>
+              </a:rPr>
               <a:t/>
             </a:r>
           </a:p>
           <a:p>
             <a:r>
-              <a:rPr sz="1600" b="1"/>
+              <a:rPr sz="1600" b="1">
+                <a:solidFill>
+                  <a:srgbClr val="DAFFDE"/>
+                </a:solidFill>
+              </a:rPr>
               <a:t>→ Sterk Mandaat: Sinds 2016 heeft het Digital Transformation Team de regie strak in handen genomen vanaf de premier.</a:t>
             </a:r>
           </a:p>
           <a:p>
             <a:r>
-              <a:rPr sz="1600" b="1"/>
+              <a:rPr sz="1600" b="1">
+                <a:solidFill>
+                  <a:srgbClr val="DAFFDE"/>
+                </a:solidFill>
+              </a:rPr>
               <a:t/>
             </a:r>
           </a:p>
           <a:p>
             <a:r>
-              <a:rPr sz="1600" b="1"/>
+              <a:rPr sz="1600" b="1">
+                <a:solidFill>
+                  <a:srgbClr val="DAFFDE"/>
+                </a:solidFill>
+              </a:rPr>
               <a:t>→ REST-Transitie: Volledige overstap van SOAP naar open standaarden en internetprotocollen voor interoperabiliteit.</a:t>
             </a:r>
           </a:p>
@@ -16989,19 +17353,6 @@
       </p:bgPr>
     </p:bg>
     <p:spTree>
-      <p:nvGrpSpPr>
-        <p:cNvPr id="1" name="Shape 171"/>
-        <p:cNvGrpSpPr/>
-        <p:nvPr/>
-      </p:nvGrpSpPr>
-      <p:grpSpPr>
-        <a:xfrm>
-          <a:off x="0" y="0"/>
-          <a:ext cx="0" cy="0"/>
-          <a:chOff x="0" y="0"/>
-          <a:chExt cx="0" cy="0"/>
-        </a:xfrm>
-      </p:grpSpPr>
       <p:pic>
         <p:nvPicPr>
           <p:cNvPr id="172" name="Google Shape;172;p20" descr="image.png"/>
@@ -17083,6 +17434,19 @@
           </a:ln>
         </p:spPr>
       </p:pic>
+      <p:nvGrpSpPr>
+        <p:cNvPr id="1" name="Shape 171"/>
+        <p:cNvGrpSpPr/>
+        <p:nvPr/>
+      </p:nvGrpSpPr>
+      <p:grpSpPr>
+        <a:xfrm>
+          <a:off x="0" y="0"/>
+          <a:ext cx="0" cy="0"/>
+          <a:chOff x="0" y="0"/>
+          <a:chExt cx="0" cy="0"/>
+        </a:xfrm>
+      </p:grpSpPr>
       <p:sp>
         <p:nvSpPr>
           <p:cNvPr id="176" name="TextBox 175"/>
@@ -17106,7 +17470,11 @@
           <a:lstStyle/>
           <a:p>
             <a:r>
-              <a:rPr sz="2800" b="1"/>
+              <a:rPr sz="2800" b="1">
+                <a:solidFill>
+                  <a:srgbClr val="F5F5F5"/>
+                </a:solidFill>
+              </a:rPr>
               <a:t>Lessen uit Italië</a:t>
             </a:r>
           </a:p>
@@ -17135,43 +17503,71 @@
           <a:lstStyle/>
           <a:p>
             <a:r>
-              <a:rPr sz="1600" b="1"/>
+              <a:rPr sz="1600" b="1">
+                <a:solidFill>
+                  <a:srgbClr val="DAFFDE"/>
+                </a:solidFill>
+              </a:rPr>
               <a:t>Strategische successen en platforms:</a:t>
             </a:r>
           </a:p>
           <a:p>
             <a:r>
-              <a:rPr sz="1600" b="1"/>
+              <a:rPr sz="1600" b="1">
+                <a:solidFill>
+                  <a:srgbClr val="DAFFDE"/>
+                </a:solidFill>
+              </a:rPr>
               <a:t/>
             </a:r>
           </a:p>
           <a:p>
             <a:r>
-              <a:rPr sz="1600" b="1"/>
+              <a:rPr sz="1600" b="1">
+                <a:solidFill>
+                  <a:srgbClr val="DAFFDE"/>
+                </a:solidFill>
+              </a:rPr>
               <a:t>→ Nationale registers: Succesvolle integratie via de centrale API-catalogus (api.gov.it) en schema-register.</a:t>
             </a:r>
           </a:p>
           <a:p>
             <a:r>
-              <a:rPr sz="1600" b="1"/>
+              <a:rPr sz="1600" b="1">
+                <a:solidFill>
+                  <a:srgbClr val="DAFFDE"/>
+                </a:solidFill>
+              </a:rPr>
               <a:t/>
             </a:r>
           </a:p>
           <a:p>
             <a:r>
-              <a:rPr sz="1600" b="1"/>
+              <a:rPr sz="1600" b="1">
+                <a:solidFill>
+                  <a:srgbClr val="DAFFDE"/>
+                </a:solidFill>
+              </a:rPr>
               <a:t>→ Mensen &amp; wetten: Je hebt niet altijd harde wetgeving nodig... tenzij het niet anders kan. Zorg voor juridische expertise in je team.</a:t>
             </a:r>
           </a:p>
           <a:p>
             <a:r>
-              <a:rPr sz="1600" b="1"/>
+              <a:rPr sz="1600" b="1">
+                <a:solidFill>
+                  <a:srgbClr val="DAFFDE"/>
+                </a:solidFill>
+              </a:rPr>
               <a:t/>
             </a:r>
           </a:p>
           <a:p>
             <a:r>
-              <a:rPr sz="1600" b="1"/>
+              <a:rPr sz="1600" b="1">
+                <a:solidFill>
+                  <a:srgbClr val="DAFFDE"/>
+                </a:solidFill>
+              </a:rPr>
               <a:t>→ EIF Interoperabiliteit: Strikte naleving van de Europese interoperabiliteits-architectuur voorkomt technische omwegen.</a:t>
             </a:r>
           </a:p>
@@ -17197,19 +17593,6 @@
       </p:bgPr>
     </p:bg>
     <p:spTree>
-      <p:nvGrpSpPr>
-        <p:cNvPr id="1" name="Shape 186"/>
-        <p:cNvGrpSpPr/>
-        <p:nvPr/>
-      </p:nvGrpSpPr>
-      <p:grpSpPr>
-        <a:xfrm>
-          <a:off x="0" y="0"/>
-          <a:ext cx="0" cy="0"/>
-          <a:chOff x="0" y="0"/>
-          <a:chExt cx="0" cy="0"/>
-        </a:xfrm>
-      </p:grpSpPr>
       <p:pic>
         <p:nvPicPr>
           <p:cNvPr id="187" name="Google Shape;187;p21" descr="image.png"/>
@@ -17267,6 +17650,19 @@
           </a:prstGeom>
         </p:spPr>
       </p:pic>
+      <p:nvGrpSpPr>
+        <p:cNvPr id="1" name="Shape 186"/>
+        <p:cNvGrpSpPr/>
+        <p:nvPr/>
+      </p:nvGrpSpPr>
+      <p:grpSpPr>
+        <a:xfrm>
+          <a:off x="0" y="0"/>
+          <a:ext cx="0" cy="0"/>
+          <a:chOff x="0" y="0"/>
+          <a:chExt cx="0" cy="0"/>
+        </a:xfrm>
+      </p:grpSpPr>
       <p:sp>
         <p:nvSpPr>
           <p:cNvPr id="188" name="TextBox 187"/>
@@ -17290,7 +17686,11 @@
           <a:lstStyle/>
           <a:p>
             <a:r>
-              <a:rPr sz="2800" b="1"/>
+              <a:rPr sz="2800" b="1">
+                <a:solidFill>
+                  <a:srgbClr val="F5F5F5"/>
+                </a:solidFill>
+              </a:rPr>
               <a:t>Dag 2: De GraphQL Ochtend</a:t>
             </a:r>
           </a:p>
@@ -17319,7 +17719,11 @@
           <a:lstStyle/>
           <a:p>
             <a:r>
-              <a:rPr sz="1600" b="1"/>
+              <a:rPr sz="1600" b="1">
+                <a:solidFill>
+                  <a:srgbClr val="DAFFDE"/>
+                </a:solidFill>
+              </a:rPr>
               <a:t>Mythes ontmaskerd, integratie met LLM's en AI-powered mock-omgevingen.</a:t>
             </a:r>
           </a:p>
